--- a/제출물/가_예선보고서_초안.pptx
+++ b/제출물/가_예선보고서_초안.pptx
@@ -5431,7 +5431,7 @@
         </p:nvGraphicFramePr>
         <p:xfrm>
           <a:off x="685800" y="1371600"/>
-          <a:ext cx="10881360" cy="2651760"/>
+          <a:ext cx="10881360" cy="2779776"/>
         </p:xfrm>
         <a:graphic>
           <a:graphicData uri="http://schemas.openxmlformats.org/drawingml/2006/table">
@@ -5444,7 +5444,7 @@
                 <a:gridCol w="3627120"/>
                 <a:gridCol w="3627120"/>
               </a:tblGrid>
-              <a:tr h="530352">
+              <a:tr h="397110">
                 <a:tc>
                   <a:txBody>
                     <a:bodyPr/>
@@ -5533,7 +5533,7 @@
                   </a:tcPr>
                 </a:tc>
               </a:tr>
-              <a:tr h="530352">
+              <a:tr h="397110">
                 <a:tc>
                   <a:txBody>
                     <a:bodyPr/>
@@ -5553,7 +5553,7 @@
                           <a:ea typeface="맑은 고딕"/>
                           <a:cs typeface="맑은 고딕"/>
                         </a:rPr>
-                        <a:t>프로젝트가 열리지 않음</a:t>
+                        <a:t>프로젝트 로딩 실패</a:t>
                       </a:r>
                     </a:p>
                   </a:txBody>
@@ -5622,7 +5622,7 @@
                   </a:tcPr>
                 </a:tc>
               </a:tr>
-              <a:tr h="530352">
+              <a:tr h="397110">
                 <a:tc>
                   <a:txBody>
                     <a:bodyPr/>
@@ -5700,7 +5700,7 @@
                           <a:ea typeface="맑은 고딕"/>
                           <a:cs typeface="맑은 고딕"/>
                         </a:rPr>
-                        <a:t>PROGMEM 이전 → 4.4%</a:t>
+                        <a:t>PROGMEM 이전 — 4.4%</a:t>
                       </a:r>
                     </a:p>
                   </a:txBody>
@@ -5711,7 +5711,7 @@
                   </a:tcPr>
                 </a:tc>
               </a:tr>
-              <a:tr h="530352">
+              <a:tr h="397110">
                 <a:tc>
                   <a:txBody>
                     <a:bodyPr/>
@@ -5800,7 +5800,7 @@
                   </a:tcPr>
                 </a:tc>
               </a:tr>
-              <a:tr h="530352">
+              <a:tr h="397110">
                 <a:tc>
                   <a:txBody>
                     <a:bodyPr/>
@@ -5889,6 +5889,184 @@
                   </a:tcPr>
                 </a:tc>
               </a:tr>
+              <a:tr h="397110">
+                <a:tc>
+                  <a:txBody>
+                    <a:bodyPr/>
+                    <a:lstStyle/>
+                    <a:p>
+                      <a:pPr algn="l">
+                        <a:spcAft>
+                          <a:spcPts val="0"/>
+                        </a:spcAft>
+                      </a:pPr>
+                      <a:r>
+                        <a:rPr sz="1300" b="0">
+                          <a:solidFill>
+                            <a:srgbClr val="1E293B"/>
+                          </a:solidFill>
+                          <a:latin typeface="맑은 고딕"/>
+                          <a:ea typeface="맑은 고딕"/>
+                          <a:cs typeface="맑은 고딕"/>
+                        </a:rPr>
+                        <a:t>회로도에 PB5가 없음</a:t>
+                      </a:r>
+                    </a:p>
+                  </a:txBody>
+                  <a:tcPr>
+                    <a:solidFill>
+                      <a:srgbClr val="FFFFFF"/>
+                    </a:solidFill>
+                  </a:tcPr>
+                </a:tc>
+                <a:tc>
+                  <a:txBody>
+                    <a:bodyPr/>
+                    <a:lstStyle/>
+                    <a:p>
+                      <a:pPr algn="l">
+                        <a:spcAft>
+                          <a:spcPts val="0"/>
+                        </a:spcAft>
+                      </a:pPr>
+                      <a:r>
+                        <a:rPr sz="1300" b="0">
+                          <a:solidFill>
+                            <a:srgbClr val="1E293B"/>
+                          </a:solidFill>
+                          <a:latin typeface="맑은 고딕"/>
+                          <a:ea typeface="맑은 고딕"/>
+                          <a:cs typeface="맑은 고딕"/>
+                        </a:rPr>
+                        <a:t>펌웨어가 쓰는 타이밍 출력 핀이 도면에 빠짐. 핀 수가 채점 항목이다</a:t>
+                      </a:r>
+                    </a:p>
+                  </a:txBody>
+                  <a:tcPr>
+                    <a:solidFill>
+                      <a:srgbClr val="FFFFFF"/>
+                    </a:solidFill>
+                  </a:tcPr>
+                </a:tc>
+                <a:tc>
+                  <a:txBody>
+                    <a:bodyPr/>
+                    <a:lstStyle/>
+                    <a:p>
+                      <a:pPr algn="l">
+                        <a:spcAft>
+                          <a:spcPts val="0"/>
+                        </a:spcAft>
+                      </a:pPr>
+                      <a:r>
+                        <a:rPr sz="1300" b="1">
+                          <a:solidFill>
+                            <a:srgbClr val="1D4ED8"/>
+                          </a:solidFill>
+                          <a:latin typeface="맑은 고딕"/>
+                          <a:ea typeface="맑은 고딕"/>
+                          <a:cs typeface="맑은 고딕"/>
+                        </a:rPr>
+                        <a:t>펌웨어를 단일 출처로 삼아 TP1 추가</a:t>
+                      </a:r>
+                    </a:p>
+                  </a:txBody>
+                  <a:tcPr>
+                    <a:solidFill>
+                      <a:srgbClr val="FFFFFF"/>
+                    </a:solidFill>
+                  </a:tcPr>
+                </a:tc>
+              </a:tr>
+              <a:tr h="397116">
+                <a:tc>
+                  <a:txBody>
+                    <a:bodyPr/>
+                    <a:lstStyle/>
+                    <a:p>
+                      <a:pPr algn="l">
+                        <a:spcAft>
+                          <a:spcPts val="0"/>
+                        </a:spcAft>
+                      </a:pPr>
+                      <a:r>
+                        <a:rPr sz="1300" b="0">
+                          <a:solidFill>
+                            <a:srgbClr val="1E293B"/>
+                          </a:solidFill>
+                          <a:latin typeface="맑은 고딕"/>
+                          <a:ea typeface="맑은 고딕"/>
+                          <a:cs typeface="맑은 고딕"/>
+                        </a:rPr>
+                        <a:t>큐벳 용량 스펙 모순</a:t>
+                      </a:r>
+                    </a:p>
+                  </a:txBody>
+                  <a:tcPr>
+                    <a:solidFill>
+                      <a:srgbClr val="F1F5F9"/>
+                    </a:solidFill>
+                  </a:tcPr>
+                </a:tc>
+                <a:tc>
+                  <a:txBody>
+                    <a:bodyPr/>
+                    <a:lstStyle/>
+                    <a:p>
+                      <a:pPr algn="l">
+                        <a:spcAft>
+                          <a:spcPts val="0"/>
+                        </a:spcAft>
+                      </a:pPr>
+                      <a:r>
+                        <a:rPr sz="1300" b="0">
+                          <a:solidFill>
+                            <a:srgbClr val="1E293B"/>
+                          </a:solidFill>
+                          <a:latin typeface="맑은 고딕"/>
+                          <a:ea typeface="맑은 고딕"/>
+                          <a:cs typeface="맑은 고딕"/>
+                        </a:rPr>
+                        <a:t>내부 10×10×45mm 면 4.5mL 인데 스펙은 1.6mL</a:t>
+                      </a:r>
+                    </a:p>
+                  </a:txBody>
+                  <a:tcPr>
+                    <a:solidFill>
+                      <a:srgbClr val="F1F5F9"/>
+                    </a:solidFill>
+                  </a:tcPr>
+                </a:tc>
+                <a:tc>
+                  <a:txBody>
+                    <a:bodyPr/>
+                    <a:lstStyle/>
+                    <a:p>
+                      <a:pPr algn="l">
+                        <a:spcAft>
+                          <a:spcPts val="0"/>
+                        </a:spcAft>
+                      </a:pPr>
+                      <a:r>
+                        <a:rPr sz="1300" b="1">
+                          <a:solidFill>
+                            <a:srgbClr val="1D4ED8"/>
+                          </a:solidFill>
+                          <a:latin typeface="맑은 고딕"/>
+                          <a:ea typeface="맑은 고딕"/>
+                          <a:cs typeface="맑은 고딕"/>
+                        </a:rPr>
+                        <a:t>세미마이크로로 판단 — 광축 방향 통일</a:t>
+                      </a:r>
+                    </a:p>
+                  </a:txBody>
+                  <a:tcPr>
+                    <a:solidFill>
+                      <a:srgbClr val="F1F5F9"/>
+                    </a:solidFill>
+                  </a:tcPr>
+                </a:tc>
+              </a:tr>
             </a:tbl>
           </a:graphicData>
         </a:graphic>
@@ -5901,8 +6079,8 @@
         </p:nvSpPr>
         <p:spPr>
           <a:xfrm>
-            <a:off x="685800" y="4251960"/>
-            <a:ext cx="10881360" cy="1005840"/>
+            <a:off x="685800" y="4370832"/>
+            <a:ext cx="10881360" cy="1051560"/>
           </a:xfrm>
           <a:prstGeom prst="rect">
             <a:avLst/>
@@ -5947,8 +6125,8 @@
         </p:nvSpPr>
         <p:spPr>
           <a:xfrm>
-            <a:off x="886968" y="4370832"/>
-            <a:ext cx="10479024" cy="768096"/>
+            <a:off x="886968" y="4489704"/>
+            <a:ext cx="10479024" cy="813815"/>
           </a:xfrm>
           <a:prstGeom prst="rect">
             <a:avLst/>
@@ -5975,7 +6153,7 @@
                 <a:ea typeface="맑은 고딕"/>
                 <a:cs typeface="맑은 고딕"/>
               </a:rPr>
-              <a:t>★ 실험 중 발생한 하드웨어 문제를 여기에 추가할 것 (계획서 4.5절 실패 대응표 참조)</a:t>
+              <a:t>재발 방지: 도면 생성기에 check_geometry() 를 넣어 치수 모순을 매번 자체 점검한다.</a:t>
             </a:r>
           </a:p>
           <a:p>
@@ -5993,7 +6171,25 @@
                 <a:ea typeface="맑은 고딕"/>
                 <a:cs typeface="맑은 고딕"/>
               </a:rPr>
-              <a:t>요강 1-나가 명시한 항목이다. 문제를 겪지 않은 척하는 것보다 해결 과정을 보이는 편이 유리하다.</a:t>
+              <a:t>간격을 잘못된 값으로 되돌리면 생성이 실패하는 것까지 확인했다.</a:t>
+            </a:r>
+          </a:p>
+          <a:p>
+            <a:pPr algn="l">
+              <a:spcAft>
+                <a:spcPts val="300"/>
+              </a:spcAft>
+            </a:pPr>
+            <a:r>
+              <a:rPr sz="1300" b="0">
+                <a:solidFill>
+                  <a:srgbClr val="713F12"/>
+                </a:solidFill>
+                <a:latin typeface="맑은 고딕"/>
+                <a:ea typeface="맑은 고딕"/>
+                <a:cs typeface="맑은 고딕"/>
+              </a:rPr>
+              <a:t>★ 실험 중 발생한 하드웨어 문제를 여기에 추가할 것 (계획서 4.5절 실패 대응표)</a:t>
             </a:r>
           </a:p>
         </p:txBody>

--- a/제출물/가_예선보고서_초안.pptx
+++ b/제출물/가_예선보고서_초안.pptx
@@ -9466,7 +9466,7 @@
               </a:spcAft>
             </a:pPr>
             <a:r>
-              <a:rPr sz="1500" b="1">
+              <a:rPr sz="1400" b="1">
                 <a:solidFill>
                   <a:srgbClr val="1D4ED8"/>
                 </a:solidFill>
@@ -9484,7 +9484,7 @@
               </a:spcAft>
             </a:pPr>
             <a:r>
-              <a:rPr sz="1300" b="0">
+              <a:rPr sz="1200" b="0">
                 <a:solidFill>
                   <a:srgbClr val="1E293B"/>
                 </a:solidFill>
@@ -9492,7 +9492,25 @@
                 <a:ea typeface="맑은 고딕"/>
                 <a:cs typeface="맑은 고딕"/>
               </a:rPr>
-              <a:t>분류 임계값, 최소 신호 하한, 반복 측정 횟수는 현재 임시값이다.</a:t>
+              <a:t>분류 임계값·최소 신호 하한·반복 측정 횟수는 임시값이다. 반복 측정 분산을 보고 정한다.</a:t>
+            </a:r>
+          </a:p>
+          <a:p>
+            <a:pPr algn="l">
+              <a:spcAft>
+                <a:spcPts val="900"/>
+              </a:spcAft>
+            </a:pPr>
+            <a:r>
+              <a:rPr sz="1400" b="1">
+                <a:solidFill>
+                  <a:srgbClr val="1D4ED8"/>
+                </a:solidFill>
+                <a:latin typeface="맑은 고딕"/>
+                <a:ea typeface="맑은 고딕"/>
+                <a:cs typeface="맑은 고딕"/>
+              </a:rPr>
+              <a:t>하드웨어 검증이 남은 부분</a:t>
             </a:r>
           </a:p>
           <a:p>
@@ -9502,7 +9520,7 @@
               </a:spcAft>
             </a:pPr>
             <a:r>
-              <a:rPr sz="1300" b="0">
+              <a:rPr sz="1200" b="0">
                 <a:solidFill>
                   <a:srgbClr val="1E293B"/>
                 </a:solidFill>
@@ -9510,7 +9528,25 @@
                 <a:ea typeface="맑은 고딕"/>
                 <a:cs typeface="맑은 고딕"/>
               </a:rPr>
-              <a:t>같은 시료를 반복 측정했을 때의 분산을 봐야 정할 수 있어 상수로 분리해두었다.</a:t>
+              <a:t>I2C·OLED·EEPROM·버튼 드라이버는 컴파일 검증까지만 되어 있다.</a:t>
+            </a:r>
+          </a:p>
+          <a:p>
+            <a:pPr algn="l" lvl="1">
+              <a:spcAft>
+                <a:spcPts val="500"/>
+              </a:spcAft>
+            </a:pPr>
+            <a:r>
+              <a:rPr sz="1200" b="0">
+                <a:solidFill>
+                  <a:srgbClr val="1E293B"/>
+                </a:solidFill>
+                <a:latin typeface="맑은 고딕"/>
+                <a:ea typeface="맑은 고딕"/>
+                <a:cs typeface="맑은 고딕"/>
+              </a:rPr>
+              <a:t>분류 로직은 PC 단위 테스트 24개 항목으로 검증했다. 드라이버는 실물이 필요하다.</a:t>
             </a:r>
           </a:p>
           <a:p>
@@ -9520,7 +9556,7 @@
               </a:spcAft>
             </a:pPr>
             <a:r>
-              <a:rPr sz="1500" b="1">
+              <a:rPr sz="1400" b="1">
                 <a:solidFill>
                   <a:srgbClr val="1D4ED8"/>
                 </a:solidFill>
@@ -9528,7 +9564,7 @@
                 <a:ea typeface="맑은 고딕"/>
                 <a:cs typeface="맑은 고딕"/>
               </a:rPr>
-              <a:t>하드웨어 검증이 남은 부분</a:t>
+              <a:t>설계상 남은 한계</a:t>
             </a:r>
           </a:p>
           <a:p>
@@ -9538,7 +9574,7 @@
               </a:spcAft>
             </a:pPr>
             <a:r>
-              <a:rPr sz="1300" b="0">
+              <a:rPr sz="1200" b="0">
                 <a:solidFill>
                   <a:srgbClr val="1E293B"/>
                 </a:solidFill>
@@ -9546,7 +9582,7 @@
                 <a:ea typeface="맑은 고딕"/>
                 <a:cs typeface="맑은 고딕"/>
               </a:rPr>
-              <a:t>I2C·OLED·EEPROM·버튼 드라이버는 컴파일 검증까지만 되어 있다.</a:t>
+              <a:t>LED·칩 개체차 — 같은 로트로 완화했을 뿐 제거하지 못했다. 보드를 바꾸면 중심점을 다시 학습해야 한다.</a:t>
             </a:r>
           </a:p>
           <a:p>
@@ -9556,7 +9592,7 @@
               </a:spcAft>
             </a:pPr>
             <a:r>
-              <a:rPr sz="1300" b="0">
+              <a:rPr sz="1200" b="0">
                 <a:solidFill>
                   <a:srgbClr val="1E293B"/>
                 </a:solidFill>
@@ -9564,25 +9600,7 @@
                 <a:ea typeface="맑은 고딕"/>
                 <a:cs typeface="맑은 고딕"/>
               </a:rPr>
-              <a:t>분류 로직은 PC 단위 테스트 24개 항목으로 검증했으나, 드라이버는 실물이 필요하다.</a:t>
-            </a:r>
-          </a:p>
-          <a:p>
-            <a:pPr algn="l">
-              <a:spcAft>
-                <a:spcPts val="900"/>
-              </a:spcAft>
-            </a:pPr>
-            <a:r>
-              <a:rPr sz="1500" b="1">
-                <a:solidFill>
-                  <a:srgbClr val="1D4ED8"/>
-                </a:solidFill>
-                <a:latin typeface="맑은 고딕"/>
-                <a:ea typeface="맑은 고딕"/>
-                <a:cs typeface="맑은 고딕"/>
-              </a:rPr>
-              <a:t>설계상 남은 한계</a:t>
+              <a:t>온도 드리프트 보정 미구현 — 세션 시작·종료 시 증류수 재측정 절차로 대응한다.</a:t>
             </a:r>
           </a:p>
           <a:p>
@@ -9592,7 +9610,7 @@
               </a:spcAft>
             </a:pPr>
             <a:r>
-              <a:rPr sz="1300" b="0">
+              <a:rPr sz="1200" b="0">
                 <a:solidFill>
                   <a:srgbClr val="1E293B"/>
                 </a:solidFill>
@@ -9600,43 +9618,7 @@
                 <a:ea typeface="맑은 고딕"/>
                 <a:cs typeface="맑은 고딕"/>
               </a:rPr>
-              <a:t>검출 LED의 개체차 보정은 같은 로트 소자로 완화했을 뿐 완전히 제거하지 못했다.</a:t>
-            </a:r>
-          </a:p>
-          <a:p>
-            <a:pPr algn="l" lvl="1">
-              <a:spcAft>
-                <a:spcPts val="500"/>
-              </a:spcAft>
-            </a:pPr>
-            <a:r>
-              <a:rPr sz="1300" b="0">
-                <a:solidFill>
-                  <a:srgbClr val="1E293B"/>
-                </a:solidFill>
-                <a:latin typeface="맑은 고딕"/>
-                <a:ea typeface="맑은 고딕"/>
-                <a:cs typeface="맑은 고딕"/>
-              </a:rPr>
-              <a:t>온도 드리프트 보정 미구현 — 세션 시작·종료 시 증류수 재측정 절차로 대응한다.</a:t>
-            </a:r>
-          </a:p>
-          <a:p>
-            <a:pPr algn="l" lvl="1">
-              <a:spcAft>
-                <a:spcPts val="500"/>
-              </a:spcAft>
-            </a:pPr>
-            <a:r>
-              <a:rPr sz="1300" b="0">
-                <a:solidFill>
-                  <a:srgbClr val="1E293B"/>
-                </a:solidFill>
-                <a:latin typeface="맑은 고딕"/>
-                <a:ea typeface="맑은 고딕"/>
-                <a:cs typeface="맑은 고딕"/>
-              </a:rPr>
-              <a:t>적외선(940nm) 채널은 구매한 소자가 가시광 차단 패키지여서 이번 범위에서 제외했다.</a:t>
+              <a:t>가시광 3채널만 다루므로 흡광이 유사한 물질은 구분되지 않는다 — IR 채널은 향후 과제.</a:t>
             </a:r>
           </a:p>
         </p:txBody>
@@ -9649,8 +9631,8 @@
         </p:nvSpPr>
         <p:spPr>
           <a:xfrm>
-            <a:off x="685800" y="5074920"/>
-            <a:ext cx="10881360" cy="1188720"/>
+            <a:off x="685800" y="5349240"/>
+            <a:ext cx="10881360" cy="868680"/>
           </a:xfrm>
           <a:prstGeom prst="rect">
             <a:avLst/>
@@ -9695,8 +9677,8 @@
         </p:nvSpPr>
         <p:spPr>
           <a:xfrm>
-            <a:off x="886968" y="5193792"/>
-            <a:ext cx="10479024" cy="950976"/>
+            <a:off x="886968" y="5468112"/>
+            <a:ext cx="10479024" cy="630936"/>
           </a:xfrm>
           <a:prstGeom prst="rect">
             <a:avLst/>
@@ -9723,7 +9705,7 @@
                 <a:ea typeface="맑은 고딕"/>
                 <a:cs typeface="맑은 고딕"/>
               </a:rPr>
-              <a:t>요강이 명시적으로 요구하는 항목이다. 비워두지 말 것.</a:t>
+              <a:t>최근접 중심점 분류기는 각 시료군이 구형으로 분포한다고 가정한다. 비대칭이면 판별 성능이 떨어진다 (계획서 8.3절).</a:t>
             </a:r>
           </a:p>
           <a:p>
@@ -9741,7 +9723,7 @@
                 <a:ea typeface="맑은 고딕"/>
                 <a:cs typeface="맑은 고딕"/>
               </a:rPr>
-              <a:t>계획서 7장: '미완료 부분을 명시하는 것이 누락하는 것보다 유리하다'</a:t>
+              <a:t>★ 실험 후: 확정된 상수와 검증이 끝난 항목은 결과 슬라이드로 옮길 것</a:t>
             </a:r>
           </a:p>
         </p:txBody>

--- a/제출물/가_예선보고서_초안.pptx
+++ b/제출물/가_예선보고서_초안.pptx
@@ -9528,7 +9528,7 @@
                 <a:ea typeface="맑은 고딕"/>
                 <a:cs typeface="맑은 고딕"/>
               </a:rPr>
-              <a:t>I2C·OLED·EEPROM·버튼 드라이버는 컴파일 검증까지만 되어 있다.</a:t>
+              <a:t>I2C·OLED 드라이버는 컴파일 검증까지만 되어 있다. 실물 없이는 확인할 수 없다.</a:t>
             </a:r>
           </a:p>
           <a:p>
@@ -9546,7 +9546,7 @@
                 <a:ea typeface="맑은 고딕"/>
                 <a:cs typeface="맑은 고딕"/>
               </a:rPr>
-              <a:t>분류 로직은 PC 단위 테스트 24개 항목으로 검증했다. 드라이버는 실물이 필요하다.</a:t>
+              <a:t>분류·버튼·EEPROM 은 PC 단위 테스트 60개 항목으로 검증했다 (변이 테스트로 검출력 확인).</a:t>
             </a:r>
           </a:p>
           <a:p>

--- a/제출물/가_예선보고서_초안.pptx
+++ b/제출물/가_예선보고서_초안.pptx
@@ -10872,7 +10872,7 @@
                           <a:ea typeface="맑은 고딕"/>
                           <a:cs typeface="맑은 고딕"/>
                         </a:rPr>
-                        <a:t>6,634 B (20.2%)</a:t>
+                        <a:t>6,672 B (20.4%)</a:t>
                       </a:r>
                     </a:p>
                   </a:txBody>

--- a/제출물/가_예선보고서_초안.pptx
+++ b/제출물/가_예선보고서_초안.pptx
@@ -10872,7 +10872,7 @@
                           <a:ea typeface="맑은 고딕"/>
                           <a:cs typeface="맑은 고딕"/>
                         </a:rPr>
-                        <a:t>6,672 B (20.4%)</a:t>
+                        <a:t>6,690 B (20.4%)</a:t>
                       </a:r>
                     </a:p>
                   </a:txBody>
